--- a/暑期實習進度報告/presentation(1).pptx
+++ b/暑期實習進度報告/presentation(1).pptx
@@ -208,7 +208,7 @@
           <a:p>
             <a:fld id="{D54B67A6-86C8-4AEC-8A8F-6C2F464F56C5}" type="datetimeFigureOut">
               <a:rPr lang="zh-TW" altLang="en-US" smtClean="0"/>
-              <a:t>2026/7/26</a:t>
+              <a:t>2026/7/27</a:t>
             </a:fld>
             <a:endParaRPr lang="zh-TW" altLang="en-US"/>
           </a:p>
@@ -874,7 +874,7 @@
           <a:p>
             <a:fld id="{7E37C305-5696-4A7F-86AE-9C076744B4EA}" type="datetime1">
               <a:rPr lang="zh-TW" altLang="en-US" smtClean="0"/>
-              <a:t>2026/7/26</a:t>
+              <a:t>2026/7/27</a:t>
             </a:fld>
             <a:endParaRPr lang="zh-TW" altLang="en-US"/>
           </a:p>
@@ -1219,7 +1219,7 @@
           <a:p>
             <a:fld id="{3E0432D5-B03D-4717-A904-795F862C1E5D}" type="datetime1">
               <a:rPr lang="zh-TW" altLang="en-US" smtClean="0"/>
-              <a:t>2026/7/26</a:t>
+              <a:t>2026/7/27</a:t>
             </a:fld>
             <a:endParaRPr lang="zh-TW" altLang="en-US"/>
           </a:p>
@@ -1620,7 +1620,7 @@
           <a:p>
             <a:fld id="{2525C8B2-1CA8-4214-9C14-3CAA749726CE}" type="datetime1">
               <a:rPr lang="zh-TW" altLang="en-US" smtClean="0"/>
-              <a:t>2026/7/26</a:t>
+              <a:t>2026/7/27</a:t>
             </a:fld>
             <a:endParaRPr lang="zh-TW" altLang="en-US"/>
           </a:p>
@@ -1956,7 +1956,7 @@
           <a:p>
             <a:fld id="{E78A667E-6D94-4A33-B267-6660FFC03615}" type="datetime1">
               <a:rPr lang="zh-TW" altLang="en-US" smtClean="0"/>
-              <a:t>2026/7/26</a:t>
+              <a:t>2026/7/27</a:t>
             </a:fld>
             <a:endParaRPr lang="zh-TW" altLang="en-US"/>
           </a:p>
@@ -2276,7 +2276,7 @@
           <a:p>
             <a:fld id="{6652C43B-7B97-41B4-A0D9-48858736EFA4}" type="datetime1">
               <a:rPr lang="zh-TW" altLang="en-US" smtClean="0"/>
-              <a:t>2026/7/26</a:t>
+              <a:t>2026/7/27</a:t>
             </a:fld>
             <a:endParaRPr lang="zh-TW" altLang="en-US"/>
           </a:p>
@@ -2672,7 +2672,7 @@
           <a:p>
             <a:fld id="{569EF5B8-0A25-46D3-80D8-0863E07A873E}" type="datetime1">
               <a:rPr lang="zh-TW" altLang="en-US" smtClean="0"/>
-              <a:t>2026/7/26</a:t>
+              <a:t>2026/7/27</a:t>
             </a:fld>
             <a:endParaRPr lang="zh-TW" altLang="en-US"/>
           </a:p>
@@ -2929,7 +2929,7 @@
           <a:p>
             <a:fld id="{07D5B9F2-24E4-479E-A18C-BF8EB1ED4286}" type="datetime1">
               <a:rPr lang="zh-TW" altLang="en-US" smtClean="0"/>
-              <a:t>2026/7/26</a:t>
+              <a:t>2026/7/27</a:t>
             </a:fld>
             <a:endParaRPr lang="zh-TW" altLang="en-US"/>
           </a:p>
@@ -3191,7 +3191,7 @@
           <a:p>
             <a:fld id="{F11E6E13-70FA-486A-9C9C-12B2AF2AEAF1}" type="datetime1">
               <a:rPr lang="zh-TW" altLang="en-US" smtClean="0"/>
-              <a:t>2026/7/26</a:t>
+              <a:t>2026/7/27</a:t>
             </a:fld>
             <a:endParaRPr lang="zh-TW" altLang="en-US"/>
           </a:p>
@@ -3453,7 +3453,7 @@
           <a:p>
             <a:fld id="{BA9150FA-4614-4BF5-8794-75F97A0B2544}" type="datetime1">
               <a:rPr lang="zh-TW" altLang="en-US" smtClean="0"/>
-              <a:t>2026/7/26</a:t>
+              <a:t>2026/7/27</a:t>
             </a:fld>
             <a:endParaRPr lang="zh-TW" altLang="en-US"/>
           </a:p>
@@ -3782,7 +3782,7 @@
           <a:p>
             <a:fld id="{63D336E6-5EE0-4A71-81C3-454B5C7B8BFB}" type="datetime1">
               <a:rPr lang="zh-TW" altLang="en-US" smtClean="0"/>
-              <a:t>2026/7/26</a:t>
+              <a:t>2026/7/27</a:t>
             </a:fld>
             <a:endParaRPr lang="zh-TW" altLang="en-US"/>
           </a:p>
@@ -4105,7 +4105,7 @@
           <a:p>
             <a:fld id="{A477ED53-FC9D-48CB-AA63-3CC0B044F3C0}" type="datetime1">
               <a:rPr lang="zh-TW" altLang="en-US" smtClean="0"/>
-              <a:t>2026/7/26</a:t>
+              <a:t>2026/7/27</a:t>
             </a:fld>
             <a:endParaRPr lang="zh-TW" altLang="en-US"/>
           </a:p>
@@ -4562,7 +4562,7 @@
           <a:p>
             <a:fld id="{F37D8557-2EF5-4AB0-8FDE-59BF801865CC}" type="datetime1">
               <a:rPr lang="zh-TW" altLang="en-US" smtClean="0"/>
-              <a:t>2026/7/26</a:t>
+              <a:t>2026/7/27</a:t>
             </a:fld>
             <a:endParaRPr lang="zh-TW" altLang="en-US"/>
           </a:p>
@@ -4767,7 +4767,7 @@
           <a:p>
             <a:fld id="{3FABEE1F-4E42-4556-91FB-8362A0311142}" type="datetime1">
               <a:rPr lang="zh-TW" altLang="en-US" smtClean="0"/>
-              <a:t>2026/7/26</a:t>
+              <a:t>2026/7/27</a:t>
             </a:fld>
             <a:endParaRPr lang="zh-TW" altLang="en-US"/>
           </a:p>
@@ -4944,7 +4944,7 @@
           <a:p>
             <a:fld id="{24E9E288-AC8B-4B62-B049-7671F3A2DFF0}" type="datetime1">
               <a:rPr lang="zh-TW" altLang="en-US" smtClean="0"/>
-              <a:t>2026/7/26</a:t>
+              <a:t>2026/7/27</a:t>
             </a:fld>
             <a:endParaRPr lang="zh-TW" altLang="en-US"/>
           </a:p>
@@ -5277,7 +5277,7 @@
           <a:p>
             <a:fld id="{90C82A0F-D946-4FC0-8D63-AF5246A679AE}" type="datetime1">
               <a:rPr lang="zh-TW" altLang="en-US" smtClean="0"/>
-              <a:t>2026/7/26</a:t>
+              <a:t>2026/7/27</a:t>
             </a:fld>
             <a:endParaRPr lang="zh-TW" altLang="en-US"/>
           </a:p>
@@ -5622,7 +5622,7 @@
           <a:p>
             <a:fld id="{E61BBE9F-1777-4CD2-896A-5CE0FA3014FF}" type="datetime1">
               <a:rPr lang="zh-TW" altLang="en-US" smtClean="0"/>
-              <a:t>2026/7/26</a:t>
+              <a:t>2026/7/27</a:t>
             </a:fld>
             <a:endParaRPr lang="zh-TW" altLang="en-US"/>
           </a:p>
@@ -7914,7 +7914,7 @@
           <a:p>
             <a:fld id="{A84D7AFE-6A4C-47D2-A958-3F76A70AFF87}" type="datetime1">
               <a:rPr lang="zh-TW" altLang="en-US" smtClean="0"/>
-              <a:t>2026/7/26</a:t>
+              <a:t>2026/7/27</a:t>
             </a:fld>
             <a:endParaRPr lang="zh-TW" altLang="en-US"/>
           </a:p>
@@ -9496,6 +9496,49 @@
           </a:p>
         </p:txBody>
       </p:sp>
+      <p:sp>
+        <p:nvSpPr>
+          <p:cNvPr id="7" name="文字方塊 6">
+            <a:extLst>
+              <a:ext uri="{FF2B5EF4-FFF2-40B4-BE49-F238E27FC236}">
+                <a16:creationId xmlns:a16="http://schemas.microsoft.com/office/drawing/2014/main" id="{FB132297-6AE2-5FB6-EA95-EADD3E8D52D9}"/>
+              </a:ext>
+            </a:extLst>
+          </p:cNvPr>
+          <p:cNvSpPr txBox="1"/>
+          <p:nvPr/>
+        </p:nvSpPr>
+        <p:spPr>
+          <a:xfrm>
+            <a:off x="3030802" y="5387909"/>
+            <a:ext cx="2880918" cy="276999"/>
+          </a:xfrm>
+          <a:prstGeom prst="rect">
+            <a:avLst/>
+          </a:prstGeom>
+          <a:noFill/>
+        </p:spPr>
+        <p:txBody>
+          <a:bodyPr wrap="square">
+            <a:spAutoFit/>
+          </a:bodyPr>
+          <a:lstStyle/>
+          <a:p>
+            <a:r>
+              <a:rPr lang="en-US" altLang="zh-TW" sz="1200" dirty="0"/>
+              <a:t>*</a:t>
+            </a:r>
+            <a:r>
+              <a:rPr lang="zh-TW" altLang="zh-TW" sz="1200" dirty="0"/>
+              <a:t>K Nearest Neighbor </a:t>
+            </a:r>
+            <a:r>
+              <a:rPr lang="en-US" altLang="zh-TW" sz="1200" dirty="0"/>
+              <a:t>(KNN)</a:t>
+            </a:r>
+          </a:p>
+        </p:txBody>
+      </p:sp>
     </p:spTree>
     <p:extLst>
       <p:ext uri="{BB962C8B-B14F-4D97-AF65-F5344CB8AC3E}">
@@ -10622,7 +10665,7 @@
         </p:blipFill>
         <p:spPr>
           <a:xfrm>
-            <a:off x="324353" y="3095996"/>
+            <a:off x="304662" y="2818783"/>
             <a:ext cx="6804874" cy="1658173"/>
           </a:xfrm>
           <a:prstGeom prst="rect">
@@ -10630,6 +10673,92 @@
           </a:prstGeom>
         </p:spPr>
       </p:pic>
+      <p:sp>
+        <p:nvSpPr>
+          <p:cNvPr id="13" name="文字方塊 12">
+            <a:extLst>
+              <a:ext uri="{FF2B5EF4-FFF2-40B4-BE49-F238E27FC236}">
+                <a16:creationId xmlns:a16="http://schemas.microsoft.com/office/drawing/2014/main" id="{87E017E4-FD4F-B544-D04B-882287DC7686}"/>
+              </a:ext>
+            </a:extLst>
+          </p:cNvPr>
+          <p:cNvSpPr txBox="1"/>
+          <p:nvPr/>
+        </p:nvSpPr>
+        <p:spPr>
+          <a:xfrm>
+            <a:off x="3951856" y="5040096"/>
+            <a:ext cx="2880918" cy="276999"/>
+          </a:xfrm>
+          <a:prstGeom prst="rect">
+            <a:avLst/>
+          </a:prstGeom>
+          <a:noFill/>
+        </p:spPr>
+        <p:txBody>
+          <a:bodyPr wrap="square">
+            <a:spAutoFit/>
+          </a:bodyPr>
+          <a:lstStyle/>
+          <a:p>
+            <a:r>
+              <a:rPr lang="en-US" altLang="zh-TW" sz="1200" dirty="0"/>
+              <a:t>*</a:t>
+            </a:r>
+            <a:r>
+              <a:rPr lang="zh-TW" altLang="zh-TW" sz="1200" dirty="0"/>
+              <a:t>Over-Representation Analysis</a:t>
+            </a:r>
+            <a:r>
+              <a:rPr lang="en-US" altLang="zh-TW" sz="1200" dirty="0"/>
+              <a:t>(ORA)</a:t>
+            </a:r>
+          </a:p>
+        </p:txBody>
+      </p:sp>
+      <p:sp>
+        <p:nvSpPr>
+          <p:cNvPr id="17" name="文字方塊 16">
+            <a:extLst>
+              <a:ext uri="{FF2B5EF4-FFF2-40B4-BE49-F238E27FC236}">
+                <a16:creationId xmlns:a16="http://schemas.microsoft.com/office/drawing/2014/main" id="{2D1794ED-3C5D-38C0-88A9-B93F99C295FB}"/>
+              </a:ext>
+            </a:extLst>
+          </p:cNvPr>
+          <p:cNvSpPr txBox="1"/>
+          <p:nvPr/>
+        </p:nvSpPr>
+        <p:spPr>
+          <a:xfrm>
+            <a:off x="3951856" y="5491733"/>
+            <a:ext cx="2954060" cy="276999"/>
+          </a:xfrm>
+          <a:prstGeom prst="rect">
+            <a:avLst/>
+          </a:prstGeom>
+          <a:noFill/>
+        </p:spPr>
+        <p:txBody>
+          <a:bodyPr wrap="square">
+            <a:spAutoFit/>
+          </a:bodyPr>
+          <a:lstStyle/>
+          <a:p>
+            <a:r>
+              <a:rPr lang="en-US" altLang="zh-TW" sz="1200" dirty="0"/>
+              <a:t>*</a:t>
+            </a:r>
+            <a:r>
+              <a:rPr lang="zh-TW" altLang="zh-TW" sz="1200" dirty="0"/>
+              <a:t>Gene Set Enrichment Analysis</a:t>
+            </a:r>
+            <a:r>
+              <a:rPr lang="en-US" altLang="zh-TW" sz="1200" dirty="0"/>
+              <a:t>(GSEA)</a:t>
+            </a:r>
+          </a:p>
+        </p:txBody>
+      </p:sp>
     </p:spTree>
     <p:extLst>
       <p:ext uri="{BB962C8B-B14F-4D97-AF65-F5344CB8AC3E}">
@@ -12898,24 +13027,44 @@
           <a:lstStyle/>
           <a:p>
             <a:r>
-              <a:rPr lang="zh-TW" altLang="zh-TW" sz="1400" dirty="0"/>
+              <a:rPr lang="zh-TW" altLang="zh-TW" sz="1400" dirty="0">
+                <a:solidFill>
+                  <a:schemeClr val="tx1"/>
+                </a:solidFill>
+              </a:rPr>
               <a:t>Not all virus families have exploitable pathways</a:t>
             </a:r>
           </a:p>
           <a:p>
-            <a:endParaRPr lang="en-US" altLang="zh-TW" sz="1400" dirty="0"/>
-          </a:p>
-          <a:p>
-            <a:r>
-              <a:rPr lang="zh-TW" altLang="zh-TW" sz="1400" dirty="0"/>
+            <a:endParaRPr lang="en-US" altLang="zh-TW" sz="1400" dirty="0">
+              <a:solidFill>
+                <a:schemeClr val="tx1"/>
+              </a:solidFill>
+            </a:endParaRPr>
+          </a:p>
+          <a:p>
+            <a:r>
+              <a:rPr lang="zh-TW" altLang="zh-TW" sz="1400" dirty="0">
+                <a:solidFill>
+                  <a:schemeClr val="tx1"/>
+                </a:solidFill>
+              </a:rPr>
               <a:t>None of the path significance levels are high</a:t>
             </a:r>
           </a:p>
           <a:p>
-            <a:endParaRPr lang="en-US" altLang="zh-TW" sz="1400" dirty="0"/>
-          </a:p>
-          <a:p>
-            <a:endParaRPr lang="zh-TW" altLang="zh-TW" sz="1400" dirty="0"/>
+            <a:endParaRPr lang="en-US" altLang="zh-TW" sz="1400" dirty="0">
+              <a:solidFill>
+                <a:schemeClr val="tx1"/>
+              </a:solidFill>
+            </a:endParaRPr>
+          </a:p>
+          <a:p>
+            <a:endParaRPr lang="zh-TW" altLang="zh-TW" sz="1400" dirty="0">
+              <a:solidFill>
+                <a:schemeClr val="tx1"/>
+              </a:solidFill>
+            </a:endParaRPr>
           </a:p>
         </p:txBody>
       </p:sp>
